--- a/.lessons/21 Fundamental CRUD/15 Implementing One To One Relation In Tables/1.pptx
+++ b/.lessons/21 Fundamental CRUD/15 Implementing One To One Relation In Tables/1.pptx
@@ -6,9 +6,16 @@
   </p:sldMasterIdLst>
   <p:sldIdLst>
     <p:sldId id="401" r:id="rId2"/>
-    <p:sldId id="402" r:id="rId3"/>
-    <p:sldId id="403" r:id="rId4"/>
-    <p:sldId id="400" r:id="rId5"/>
+    <p:sldId id="405" r:id="rId3"/>
+    <p:sldId id="402" r:id="rId4"/>
+    <p:sldId id="404" r:id="rId5"/>
+    <p:sldId id="403" r:id="rId6"/>
+    <p:sldId id="406" r:id="rId7"/>
+    <p:sldId id="407" r:id="rId8"/>
+    <p:sldId id="408" r:id="rId9"/>
+    <p:sldId id="409" r:id="rId10"/>
+    <p:sldId id="410" r:id="rId11"/>
+    <p:sldId id="400" r:id="rId12"/>
   </p:sldIdLst>
   <p:sldSz cx="12192000" cy="6858000"/>
   <p:notesSz cx="6858000" cy="9144000"/>
@@ -262,7 +269,7 @@
           <a:p>
             <a:fld id="{3E102D2E-813C-461C-9963-687A650C48C0}" type="datetimeFigureOut">
               <a:rPr lang="en-US" smtClean="0"/>
-              <a:t>4/26/2025</a:t>
+              <a:t>5/22/2025</a:t>
             </a:fld>
             <a:endParaRPr lang="en-US"/>
           </a:p>
@@ -460,7 +467,7 @@
           <a:p>
             <a:fld id="{3E102D2E-813C-461C-9963-687A650C48C0}" type="datetimeFigureOut">
               <a:rPr lang="en-US" smtClean="0"/>
-              <a:t>4/26/2025</a:t>
+              <a:t>5/22/2025</a:t>
             </a:fld>
             <a:endParaRPr lang="en-US"/>
           </a:p>
@@ -668,7 +675,7 @@
           <a:p>
             <a:fld id="{3E102D2E-813C-461C-9963-687A650C48C0}" type="datetimeFigureOut">
               <a:rPr lang="en-US" smtClean="0"/>
-              <a:t>4/26/2025</a:t>
+              <a:t>5/22/2025</a:t>
             </a:fld>
             <a:endParaRPr lang="en-US"/>
           </a:p>
@@ -866,7 +873,7 @@
           <a:p>
             <a:fld id="{3E102D2E-813C-461C-9963-687A650C48C0}" type="datetimeFigureOut">
               <a:rPr lang="en-US" smtClean="0"/>
-              <a:t>4/26/2025</a:t>
+              <a:t>5/22/2025</a:t>
             </a:fld>
             <a:endParaRPr lang="en-US"/>
           </a:p>
@@ -1141,7 +1148,7 @@
           <a:p>
             <a:fld id="{3E102D2E-813C-461C-9963-687A650C48C0}" type="datetimeFigureOut">
               <a:rPr lang="en-US" smtClean="0"/>
-              <a:t>4/26/2025</a:t>
+              <a:t>5/22/2025</a:t>
             </a:fld>
             <a:endParaRPr lang="en-US"/>
           </a:p>
@@ -1406,7 +1413,7 @@
           <a:p>
             <a:fld id="{3E102D2E-813C-461C-9963-687A650C48C0}" type="datetimeFigureOut">
               <a:rPr lang="en-US" smtClean="0"/>
-              <a:t>4/26/2025</a:t>
+              <a:t>5/22/2025</a:t>
             </a:fld>
             <a:endParaRPr lang="en-US"/>
           </a:p>
@@ -1818,7 +1825,7 @@
           <a:p>
             <a:fld id="{3E102D2E-813C-461C-9963-687A650C48C0}" type="datetimeFigureOut">
               <a:rPr lang="en-US" smtClean="0"/>
-              <a:t>4/26/2025</a:t>
+              <a:t>5/22/2025</a:t>
             </a:fld>
             <a:endParaRPr lang="en-US"/>
           </a:p>
@@ -1959,7 +1966,7 @@
           <a:p>
             <a:fld id="{3E102D2E-813C-461C-9963-687A650C48C0}" type="datetimeFigureOut">
               <a:rPr lang="en-US" smtClean="0"/>
-              <a:t>4/26/2025</a:t>
+              <a:t>5/22/2025</a:t>
             </a:fld>
             <a:endParaRPr lang="en-US"/>
           </a:p>
@@ -2072,7 +2079,7 @@
           <a:p>
             <a:fld id="{3E102D2E-813C-461C-9963-687A650C48C0}" type="datetimeFigureOut">
               <a:rPr lang="en-US" smtClean="0"/>
-              <a:t>4/26/2025</a:t>
+              <a:t>5/22/2025</a:t>
             </a:fld>
             <a:endParaRPr lang="en-US"/>
           </a:p>
@@ -2383,7 +2390,7 @@
           <a:p>
             <a:fld id="{3E102D2E-813C-461C-9963-687A650C48C0}" type="datetimeFigureOut">
               <a:rPr lang="en-US" smtClean="0"/>
-              <a:t>4/26/2025</a:t>
+              <a:t>5/22/2025</a:t>
             </a:fld>
             <a:endParaRPr lang="en-US"/>
           </a:p>
@@ -2671,7 +2678,7 @@
           <a:p>
             <a:fld id="{3E102D2E-813C-461C-9963-687A650C48C0}" type="datetimeFigureOut">
               <a:rPr lang="en-US" smtClean="0"/>
-              <a:t>4/26/2025</a:t>
+              <a:t>5/22/2025</a:t>
             </a:fld>
             <a:endParaRPr lang="en-US"/>
           </a:p>
@@ -2912,7 +2919,7 @@
           <a:p>
             <a:fld id="{3E102D2E-813C-461C-9963-687A650C48C0}" type="datetimeFigureOut">
               <a:rPr lang="en-US" smtClean="0"/>
-              <a:t>4/26/2025</a:t>
+              <a:t>5/22/2025</a:t>
             </a:fld>
             <a:endParaRPr lang="en-US"/>
           </a:p>
@@ -3350,7 +3357,7 @@
         <p:spPr>
           <a:xfrm>
             <a:off x="217714" y="255046"/>
-            <a:ext cx="11756571" cy="355354"/>
+            <a:ext cx="11756571" cy="2756011"/>
           </a:xfrm>
           <a:prstGeom prst="rect">
             <a:avLst/>
@@ -3370,21 +3377,282 @@
               <a:buNone/>
             </a:pPr>
             <a:r>
-              <a:rPr kumimoji="0" lang="en-US" altLang="en-US" sz="1300" b="0" i="0" u="none" strike="noStrike" cap="none" normalizeH="0" baseline="0">
-                <a:ln>
-                  <a:noFill/>
-                </a:ln>
-                <a:solidFill>
-                  <a:schemeClr val="tx1"/>
-                </a:solidFill>
-                <a:effectLst/>
-                <a:latin typeface="Arial" panose="020B0604020202020204" pitchFamily="34" charset="0"/>
-              </a:rPr>
-              <a:t>.</a:t>
-            </a:r>
-          </a:p>
-        </p:txBody>
-      </p:sp>
+              <a:rPr lang="en-US" altLang="en-US" sz="1300">
+                <a:latin typeface="Arial" panose="020B0604020202020204" pitchFamily="34" charset="0"/>
+              </a:rPr>
+              <a:t>Bu</a:t>
+            </a:r>
+            <a:r>
+              <a:rPr lang="az-Latn-AZ" altLang="en-US" sz="1300">
+                <a:latin typeface="Arial" panose="020B0604020202020204" pitchFamily="34" charset="0"/>
+              </a:rPr>
+              <a:t>ra qədər yığdığımız </a:t>
+            </a:r>
+            <a:r>
+              <a:rPr lang="az-Latn-AZ" altLang="en-US" sz="1300" b="1">
+                <a:latin typeface="Arial" panose="020B0604020202020204" pitchFamily="34" charset="0"/>
+              </a:rPr>
+              <a:t>CRUD</a:t>
+            </a:r>
+            <a:r>
+              <a:rPr lang="az-Latn-AZ" altLang="en-US" sz="1300">
+                <a:latin typeface="Arial" panose="020B0604020202020204" pitchFamily="34" charset="0"/>
+              </a:rPr>
+              <a:t> sistemində qohumluq əlaqələrindən ( </a:t>
+            </a:r>
+            <a:r>
+              <a:rPr lang="az-Latn-AZ" altLang="en-US" sz="1300" b="1">
+                <a:latin typeface="Arial" panose="020B0604020202020204" pitchFamily="34" charset="0"/>
+              </a:rPr>
+              <a:t>Relationship</a:t>
+            </a:r>
+            <a:r>
+              <a:rPr lang="az-Latn-AZ" altLang="en-US" sz="1300">
+                <a:latin typeface="Arial" panose="020B0604020202020204" pitchFamily="34" charset="0"/>
+              </a:rPr>
+              <a:t> ) istifadə etmədik. Ancaq indi </a:t>
+            </a:r>
+            <a:r>
+              <a:rPr lang="az-Latn-AZ" altLang="en-US" sz="1300" b="1">
+                <a:latin typeface="Arial" panose="020B0604020202020204" pitchFamily="34" charset="0"/>
+              </a:rPr>
+              <a:t>One To One Relationship </a:t>
+            </a:r>
+            <a:r>
+              <a:rPr lang="az-Latn-AZ" altLang="en-US" sz="1300">
+                <a:latin typeface="Arial" panose="020B0604020202020204" pitchFamily="34" charset="0"/>
+              </a:rPr>
+              <a:t>əlaqəsini yaradaraq bilavasitə </a:t>
+            </a:r>
+            <a:r>
+              <a:rPr lang="az-Latn-AZ" altLang="en-US" sz="1300" b="1">
+                <a:latin typeface="Arial" panose="020B0604020202020204" pitchFamily="34" charset="0"/>
+              </a:rPr>
+              <a:t>Post</a:t>
+            </a:r>
+            <a:r>
+              <a:rPr lang="az-Latn-AZ" altLang="en-US" sz="1300">
+                <a:latin typeface="Arial" panose="020B0604020202020204" pitchFamily="34" charset="0"/>
+              </a:rPr>
+              <a:t> modeli ilə </a:t>
+            </a:r>
+            <a:r>
+              <a:rPr lang="az-Latn-AZ" altLang="en-US" sz="1300" b="1">
+                <a:latin typeface="Arial" panose="020B0604020202020204" pitchFamily="34" charset="0"/>
+              </a:rPr>
+              <a:t>Category</a:t>
+            </a:r>
+            <a:r>
+              <a:rPr lang="az-Latn-AZ" altLang="en-US" sz="1300">
+                <a:latin typeface="Arial" panose="020B0604020202020204" pitchFamily="34" charset="0"/>
+              </a:rPr>
+              <a:t> -ləri əldə edəcəyik. </a:t>
+            </a:r>
+          </a:p>
+          <a:p>
+            <a:pPr>
+              <a:lnSpc>
+                <a:spcPct val="150000"/>
+              </a:lnSpc>
+              <a:buNone/>
+            </a:pPr>
+            <a:endParaRPr kumimoji="0" lang="az-Latn-AZ" altLang="en-US" sz="1300" b="0" i="0" u="none" strike="noStrike" cap="none" normalizeH="0" baseline="0">
+              <a:ln>
+                <a:noFill/>
+              </a:ln>
+              <a:solidFill>
+                <a:schemeClr val="tx1"/>
+              </a:solidFill>
+              <a:effectLst/>
+              <a:latin typeface="Arial" panose="020B0604020202020204" pitchFamily="34" charset="0"/>
+            </a:endParaRPr>
+          </a:p>
+          <a:p>
+            <a:pPr>
+              <a:lnSpc>
+                <a:spcPct val="150000"/>
+              </a:lnSpc>
+              <a:buNone/>
+            </a:pPr>
+            <a:r>
+              <a:rPr lang="az-Latn-AZ" altLang="en-US" sz="1300" b="1">
+                <a:latin typeface="Arial" panose="020B0604020202020204" pitchFamily="34" charset="0"/>
+              </a:rPr>
+              <a:t>Post</a:t>
+            </a:r>
+            <a:r>
+              <a:rPr lang="az-Latn-AZ" altLang="en-US" sz="1300">
+                <a:latin typeface="Arial" panose="020B0604020202020204" pitchFamily="34" charset="0"/>
+              </a:rPr>
+              <a:t> cədvəlində artıq </a:t>
+            </a:r>
+            <a:r>
+              <a:rPr lang="az-Latn-AZ" altLang="en-US" sz="1300" b="1">
+                <a:latin typeface="Arial" panose="020B0604020202020204" pitchFamily="34" charset="0"/>
+              </a:rPr>
+              <a:t>category_id </a:t>
+            </a:r>
+            <a:r>
+              <a:rPr lang="az-Latn-AZ" altLang="en-US" sz="1300">
+                <a:latin typeface="Arial" panose="020B0604020202020204" pitchFamily="34" charset="0"/>
+              </a:rPr>
+              <a:t>adlı bir sütunumuz var. Keçid edirik </a:t>
+            </a:r>
+            <a:r>
+              <a:rPr lang="az-Latn-AZ" altLang="en-US" sz="1300" b="1">
+                <a:latin typeface="Arial" panose="020B0604020202020204" pitchFamily="34" charset="0"/>
+              </a:rPr>
+              <a:t>Post</a:t>
+            </a:r>
+            <a:r>
+              <a:rPr lang="az-Latn-AZ" altLang="en-US" sz="1300">
+                <a:latin typeface="Arial" panose="020B0604020202020204" pitchFamily="34" charset="0"/>
+              </a:rPr>
+              <a:t> modelinə və əlaqəni yaradacaq </a:t>
+            </a:r>
+            <a:r>
+              <a:rPr lang="az-Latn-AZ" altLang="en-US" sz="1300" b="1">
+                <a:latin typeface="Arial" panose="020B0604020202020204" pitchFamily="34" charset="0"/>
+              </a:rPr>
+              <a:t>metod</a:t>
+            </a:r>
+            <a:r>
+              <a:rPr lang="az-Latn-AZ" altLang="en-US" sz="1300">
+                <a:latin typeface="Arial" panose="020B0604020202020204" pitchFamily="34" charset="0"/>
+              </a:rPr>
+              <a:t> adımızı yazırıq. </a:t>
+            </a:r>
+          </a:p>
+          <a:p>
+            <a:pPr>
+              <a:lnSpc>
+                <a:spcPct val="150000"/>
+              </a:lnSpc>
+              <a:buNone/>
+            </a:pPr>
+            <a:endParaRPr lang="az-Latn-AZ" altLang="en-US" sz="1300">
+              <a:latin typeface="Arial" panose="020B0604020202020204" pitchFamily="34" charset="0"/>
+            </a:endParaRPr>
+          </a:p>
+          <a:p>
+            <a:pPr>
+              <a:lnSpc>
+                <a:spcPct val="150000"/>
+              </a:lnSpc>
+              <a:buNone/>
+            </a:pPr>
+            <a:endParaRPr lang="az-Latn-AZ" altLang="en-US" sz="1300">
+              <a:latin typeface="Arial" panose="020B0604020202020204" pitchFamily="34" charset="0"/>
+            </a:endParaRPr>
+          </a:p>
+          <a:p>
+            <a:pPr>
+              <a:lnSpc>
+                <a:spcPct val="150000"/>
+              </a:lnSpc>
+              <a:buNone/>
+            </a:pPr>
+            <a:endParaRPr lang="az-Latn-AZ" altLang="en-US" sz="1300">
+              <a:latin typeface="Arial" panose="020B0604020202020204" pitchFamily="34" charset="0"/>
+            </a:endParaRPr>
+          </a:p>
+          <a:p>
+            <a:pPr>
+              <a:lnSpc>
+                <a:spcPct val="150000"/>
+              </a:lnSpc>
+              <a:buNone/>
+            </a:pPr>
+            <a:endParaRPr lang="az-Latn-AZ" altLang="en-US" sz="1300">
+              <a:latin typeface="Arial" panose="020B0604020202020204" pitchFamily="34" charset="0"/>
+            </a:endParaRPr>
+          </a:p>
+          <a:p>
+            <a:pPr>
+              <a:lnSpc>
+                <a:spcPct val="150000"/>
+              </a:lnSpc>
+              <a:buNone/>
+            </a:pPr>
+            <a:r>
+              <a:rPr lang="en-US" altLang="en-US" sz="1300">
+                <a:latin typeface="Arial" panose="020B0604020202020204" pitchFamily="34" charset="0"/>
+              </a:rPr>
+              <a:t>H</a:t>
+            </a:r>
+            <a:r>
+              <a:rPr lang="az-Latn-AZ" altLang="en-US" sz="1300">
+                <a:latin typeface="Arial" panose="020B0604020202020204" pitchFamily="34" charset="0"/>
+              </a:rPr>
+              <a:t>ər bir </a:t>
+            </a:r>
+            <a:r>
+              <a:rPr lang="az-Latn-AZ" altLang="en-US" sz="1300" b="1">
+                <a:latin typeface="Arial" panose="020B0604020202020204" pitchFamily="34" charset="0"/>
+              </a:rPr>
+              <a:t>post</a:t>
+            </a:r>
+            <a:r>
+              <a:rPr lang="az-Latn-AZ" altLang="en-US" sz="1300">
+                <a:latin typeface="Arial" panose="020B0604020202020204" pitchFamily="34" charset="0"/>
+              </a:rPr>
+              <a:t> məxsusdur bir </a:t>
+            </a:r>
+            <a:r>
+              <a:rPr lang="az-Latn-AZ" altLang="en-US" sz="1300" b="1">
+                <a:latin typeface="Arial" panose="020B0604020202020204" pitchFamily="34" charset="0"/>
+              </a:rPr>
+              <a:t>kateqoriyaya</a:t>
+            </a:r>
+            <a:r>
+              <a:rPr lang="az-Latn-AZ" altLang="en-US" sz="1300">
+                <a:latin typeface="Arial" panose="020B0604020202020204" pitchFamily="34" charset="0"/>
+              </a:rPr>
+              <a:t> demiş oluruq burada.</a:t>
+            </a:r>
+            <a:endParaRPr kumimoji="0" lang="en-US" altLang="en-US" sz="1300" b="0" i="0" u="none" strike="noStrike" cap="none" normalizeH="0" baseline="0">
+              <a:ln>
+                <a:noFill/>
+              </a:ln>
+              <a:solidFill>
+                <a:schemeClr val="tx1"/>
+              </a:solidFill>
+              <a:effectLst/>
+              <a:latin typeface="Arial" panose="020B0604020202020204" pitchFamily="34" charset="0"/>
+            </a:endParaRPr>
+          </a:p>
+        </p:txBody>
+      </p:sp>
+      <p:pic>
+        <p:nvPicPr>
+          <p:cNvPr id="4" name="Picture 3">
+            <a:extLst>
+              <a:ext uri="{FF2B5EF4-FFF2-40B4-BE49-F238E27FC236}">
+                <a16:creationId xmlns:a16="http://schemas.microsoft.com/office/drawing/2014/main" id="{D6B61B4C-FC40-3950-D0E3-452304686170}"/>
+              </a:ext>
+            </a:extLst>
+          </p:cNvPr>
+          <p:cNvPicPr>
+            <a:picLocks noChangeAspect="1"/>
+          </p:cNvPicPr>
+          <p:nvPr/>
+        </p:nvPicPr>
+        <p:blipFill>
+          <a:blip r:embed="rId2"/>
+          <a:stretch>
+            <a:fillRect/>
+          </a:stretch>
+        </p:blipFill>
+        <p:spPr>
+          <a:xfrm>
+            <a:off x="6552413" y="2418730"/>
+            <a:ext cx="5639587" cy="4439270"/>
+          </a:xfrm>
+          <a:prstGeom prst="rect">
+            <a:avLst/>
+          </a:prstGeom>
+        </p:spPr>
+      </p:pic>
     </p:spTree>
     <p:extLst>
       <p:ext uri="{BB962C8B-B14F-4D97-AF65-F5344CB8AC3E}">
@@ -3398,7 +3666,382 @@
 </p:sld>
 </file>
 
+<file path=ppt/slides/slide10.xml><?xml version="1.0" encoding="utf-8"?>
+<p:sld xmlns:a="http://schemas.openxmlformats.org/drawingml/2006/main" xmlns:r="http://schemas.openxmlformats.org/officeDocument/2006/relationships" xmlns:p="http://schemas.openxmlformats.org/presentationml/2006/main">
+  <p:cSld>
+    <p:spTree>
+      <p:nvGrpSpPr>
+        <p:cNvPr id="1" name="">
+          <a:extLst>
+            <a:ext uri="{FF2B5EF4-FFF2-40B4-BE49-F238E27FC236}">
+              <a16:creationId xmlns:a16="http://schemas.microsoft.com/office/drawing/2014/main" id="{A827BE02-87CA-E0A5-FCFF-2615CBAABBCF}"/>
+            </a:ext>
+          </a:extLst>
+        </p:cNvPr>
+        <p:cNvGrpSpPr/>
+        <p:nvPr/>
+      </p:nvGrpSpPr>
+      <p:grpSpPr>
+        <a:xfrm>
+          <a:off x="0" y="0"/>
+          <a:ext cx="0" cy="0"/>
+          <a:chOff x="0" y="0"/>
+          <a:chExt cx="0" cy="0"/>
+        </a:xfrm>
+      </p:grpSpPr>
+      <p:sp>
+        <p:nvSpPr>
+          <p:cNvPr id="3" name="TextBox 2">
+            <a:extLst>
+              <a:ext uri="{FF2B5EF4-FFF2-40B4-BE49-F238E27FC236}">
+                <a16:creationId xmlns:a16="http://schemas.microsoft.com/office/drawing/2014/main" id="{82CA6C62-0F50-E95D-FBD2-8C87965425B0}"/>
+              </a:ext>
+            </a:extLst>
+          </p:cNvPr>
+          <p:cNvSpPr txBox="1"/>
+          <p:nvPr/>
+        </p:nvSpPr>
+        <p:spPr>
+          <a:xfrm>
+            <a:off x="217714" y="255046"/>
+            <a:ext cx="11756571" cy="355354"/>
+          </a:xfrm>
+          <a:prstGeom prst="rect">
+            <a:avLst/>
+          </a:prstGeom>
+          <a:noFill/>
+        </p:spPr>
+        <p:txBody>
+          <a:bodyPr wrap="square">
+            <a:spAutoFit/>
+          </a:bodyPr>
+          <a:lstStyle/>
+          <a:p>
+            <a:pPr>
+              <a:lnSpc>
+                <a:spcPct val="150000"/>
+              </a:lnSpc>
+              <a:buNone/>
+            </a:pPr>
+            <a:r>
+              <a:rPr kumimoji="0" lang="en-US" altLang="en-US" sz="1300" b="0" i="0" u="none" strike="noStrike" cap="none" normalizeH="0" baseline="0">
+                <a:ln>
+                  <a:noFill/>
+                </a:ln>
+                <a:solidFill>
+                  <a:schemeClr val="tx1"/>
+                </a:solidFill>
+                <a:effectLst/>
+                <a:latin typeface="Arial" panose="020B0604020202020204" pitchFamily="34" charset="0"/>
+              </a:rPr>
+              <a:t>.</a:t>
+            </a:r>
+          </a:p>
+        </p:txBody>
+      </p:sp>
+    </p:spTree>
+    <p:extLst>
+      <p:ext uri="{BB962C8B-B14F-4D97-AF65-F5344CB8AC3E}">
+        <p14:creationId xmlns:p14="http://schemas.microsoft.com/office/powerpoint/2010/main" val="472812886"/>
+      </p:ext>
+    </p:extLst>
+  </p:cSld>
+  <p:clrMapOvr>
+    <a:masterClrMapping/>
+  </p:clrMapOvr>
+</p:sld>
+</file>
+
+<file path=ppt/slides/slide11.xml><?xml version="1.0" encoding="utf-8"?>
+<p:sld xmlns:a="http://schemas.openxmlformats.org/drawingml/2006/main" xmlns:r="http://schemas.openxmlformats.org/officeDocument/2006/relationships" xmlns:p="http://schemas.openxmlformats.org/presentationml/2006/main">
+  <p:cSld>
+    <p:spTree>
+      <p:nvGrpSpPr>
+        <p:cNvPr id="1" name="">
+          <a:extLst>
+            <a:ext uri="{FF2B5EF4-FFF2-40B4-BE49-F238E27FC236}">
+              <a16:creationId xmlns:a16="http://schemas.microsoft.com/office/drawing/2014/main" id="{ECE25D7D-A080-F22B-7E8D-36EC827289A1}"/>
+            </a:ext>
+          </a:extLst>
+        </p:cNvPr>
+        <p:cNvGrpSpPr/>
+        <p:nvPr/>
+      </p:nvGrpSpPr>
+      <p:grpSpPr>
+        <a:xfrm>
+          <a:off x="0" y="0"/>
+          <a:ext cx="0" cy="0"/>
+          <a:chOff x="0" y="0"/>
+          <a:chExt cx="0" cy="0"/>
+        </a:xfrm>
+      </p:grpSpPr>
+      <p:sp>
+        <p:nvSpPr>
+          <p:cNvPr id="3" name="TextBox 2">
+            <a:extLst>
+              <a:ext uri="{FF2B5EF4-FFF2-40B4-BE49-F238E27FC236}">
+                <a16:creationId xmlns:a16="http://schemas.microsoft.com/office/drawing/2014/main" id="{E33F16A3-A6E8-401E-847B-09570DC6E4CB}"/>
+              </a:ext>
+            </a:extLst>
+          </p:cNvPr>
+          <p:cNvSpPr txBox="1"/>
+          <p:nvPr/>
+        </p:nvSpPr>
+        <p:spPr>
+          <a:xfrm>
+            <a:off x="217714" y="255046"/>
+            <a:ext cx="11756571" cy="355354"/>
+          </a:xfrm>
+          <a:prstGeom prst="rect">
+            <a:avLst/>
+          </a:prstGeom>
+          <a:noFill/>
+        </p:spPr>
+        <p:txBody>
+          <a:bodyPr wrap="square">
+            <a:spAutoFit/>
+          </a:bodyPr>
+          <a:lstStyle/>
+          <a:p>
+            <a:pPr>
+              <a:lnSpc>
+                <a:spcPct val="150000"/>
+              </a:lnSpc>
+              <a:buNone/>
+            </a:pPr>
+            <a:r>
+              <a:rPr kumimoji="0" lang="en-US" altLang="en-US" sz="1300" b="0" i="0" u="none" strike="noStrike" cap="none" normalizeH="0" baseline="0">
+                <a:ln>
+                  <a:noFill/>
+                </a:ln>
+                <a:solidFill>
+                  <a:schemeClr val="tx1"/>
+                </a:solidFill>
+                <a:effectLst/>
+                <a:latin typeface="Arial" panose="020B0604020202020204" pitchFamily="34" charset="0"/>
+              </a:rPr>
+              <a:t>.</a:t>
+            </a:r>
+          </a:p>
+        </p:txBody>
+      </p:sp>
+    </p:spTree>
+    <p:extLst>
+      <p:ext uri="{BB962C8B-B14F-4D97-AF65-F5344CB8AC3E}">
+        <p14:creationId xmlns:p14="http://schemas.microsoft.com/office/powerpoint/2010/main" val="3095838342"/>
+      </p:ext>
+    </p:extLst>
+  </p:cSld>
+  <p:clrMapOvr>
+    <a:masterClrMapping/>
+  </p:clrMapOvr>
+</p:sld>
+</file>
+
 <file path=ppt/slides/slide2.xml><?xml version="1.0" encoding="utf-8"?>
+<p:sld xmlns:a="http://schemas.openxmlformats.org/drawingml/2006/main" xmlns:r="http://schemas.openxmlformats.org/officeDocument/2006/relationships" xmlns:p="http://schemas.openxmlformats.org/presentationml/2006/main">
+  <p:cSld>
+    <p:spTree>
+      <p:nvGrpSpPr>
+        <p:cNvPr id="1" name="">
+          <a:extLst>
+            <a:ext uri="{FF2B5EF4-FFF2-40B4-BE49-F238E27FC236}">
+              <a16:creationId xmlns:a16="http://schemas.microsoft.com/office/drawing/2014/main" id="{A6800DD6-B8F3-3F19-F4F9-4C4ADC6FBF9D}"/>
+            </a:ext>
+          </a:extLst>
+        </p:cNvPr>
+        <p:cNvGrpSpPr/>
+        <p:nvPr/>
+      </p:nvGrpSpPr>
+      <p:grpSpPr>
+        <a:xfrm>
+          <a:off x="0" y="0"/>
+          <a:ext cx="0" cy="0"/>
+          <a:chOff x="0" y="0"/>
+          <a:chExt cx="0" cy="0"/>
+        </a:xfrm>
+      </p:grpSpPr>
+      <p:sp>
+        <p:nvSpPr>
+          <p:cNvPr id="3" name="TextBox 2">
+            <a:extLst>
+              <a:ext uri="{FF2B5EF4-FFF2-40B4-BE49-F238E27FC236}">
+                <a16:creationId xmlns:a16="http://schemas.microsoft.com/office/drawing/2014/main" id="{625F1543-509C-5B62-37C9-2B4A45F6CACA}"/>
+              </a:ext>
+            </a:extLst>
+          </p:cNvPr>
+          <p:cNvSpPr txBox="1"/>
+          <p:nvPr/>
+        </p:nvSpPr>
+        <p:spPr>
+          <a:xfrm>
+            <a:off x="217714" y="255046"/>
+            <a:ext cx="11756571" cy="655436"/>
+          </a:xfrm>
+          <a:prstGeom prst="rect">
+            <a:avLst/>
+          </a:prstGeom>
+          <a:noFill/>
+        </p:spPr>
+        <p:txBody>
+          <a:bodyPr wrap="square">
+            <a:spAutoFit/>
+          </a:bodyPr>
+          <a:lstStyle/>
+          <a:p>
+            <a:pPr>
+              <a:lnSpc>
+                <a:spcPct val="150000"/>
+              </a:lnSpc>
+              <a:buNone/>
+            </a:pPr>
+            <a:r>
+              <a:rPr lang="az-Latn-AZ" altLang="en-US" sz="1300">
+                <a:latin typeface="Arial" panose="020B0604020202020204" pitchFamily="34" charset="0"/>
+              </a:rPr>
+              <a:t>Artıq </a:t>
+            </a:r>
+            <a:r>
+              <a:rPr lang="az-Latn-AZ" altLang="en-US" sz="1300" b="1">
+                <a:latin typeface="Arial" panose="020B0604020202020204" pitchFamily="34" charset="0"/>
+              </a:rPr>
+              <a:t>index.blade.php </a:t>
+            </a:r>
+            <a:r>
+              <a:rPr lang="az-Latn-AZ" altLang="en-US" sz="1300">
+                <a:latin typeface="Arial" panose="020B0604020202020204" pitchFamily="34" charset="0"/>
+              </a:rPr>
+              <a:t>faylında </a:t>
+            </a:r>
+            <a:r>
+              <a:rPr lang="az-Latn-AZ" altLang="en-US" sz="1300" b="1">
+                <a:latin typeface="Arial" panose="020B0604020202020204" pitchFamily="34" charset="0"/>
+              </a:rPr>
+              <a:t>category</a:t>
+            </a:r>
+            <a:r>
+              <a:rPr lang="az-Latn-AZ" altLang="en-US" sz="1300">
+                <a:latin typeface="Arial" panose="020B0604020202020204" pitchFamily="34" charset="0"/>
+              </a:rPr>
+              <a:t> -lərin </a:t>
+            </a:r>
+            <a:r>
+              <a:rPr lang="az-Latn-AZ" altLang="en-US" sz="1300" b="1">
+                <a:latin typeface="Arial" panose="020B0604020202020204" pitchFamily="34" charset="0"/>
+              </a:rPr>
+              <a:t>identifikatorları</a:t>
+            </a:r>
+            <a:r>
+              <a:rPr lang="az-Latn-AZ" altLang="en-US" sz="1300">
+                <a:latin typeface="Arial" panose="020B0604020202020204" pitchFamily="34" charset="0"/>
+              </a:rPr>
+              <a:t> əvəzinə, </a:t>
+            </a:r>
+            <a:r>
+              <a:rPr lang="az-Latn-AZ" altLang="en-US" sz="1300" b="1">
+                <a:latin typeface="Arial" panose="020B0604020202020204" pitchFamily="34" charset="0"/>
+              </a:rPr>
+              <a:t>Post</a:t>
+            </a:r>
+            <a:r>
+              <a:rPr lang="az-Latn-AZ" altLang="en-US" sz="1300">
+                <a:latin typeface="Arial" panose="020B0604020202020204" pitchFamily="34" charset="0"/>
+              </a:rPr>
+              <a:t> modelində yaratdığımız </a:t>
+            </a:r>
+            <a:r>
+              <a:rPr lang="az-Latn-AZ" altLang="en-US" sz="1300" b="1">
+                <a:latin typeface="Arial" panose="020B0604020202020204" pitchFamily="34" charset="0"/>
+              </a:rPr>
+              <a:t>category() </a:t>
+            </a:r>
+            <a:r>
+              <a:rPr lang="az-Latn-AZ" altLang="en-US" sz="1300">
+                <a:latin typeface="Arial" panose="020B0604020202020204" pitchFamily="34" charset="0"/>
+              </a:rPr>
+              <a:t>metodundan istifadə edərək </a:t>
+            </a:r>
+            <a:r>
+              <a:rPr lang="az-Latn-AZ" altLang="en-US" sz="1300" b="1">
+                <a:latin typeface="Arial" panose="020B0604020202020204" pitchFamily="34" charset="0"/>
+              </a:rPr>
+              <a:t>Cateogry</a:t>
+            </a:r>
+            <a:r>
+              <a:rPr lang="az-Latn-AZ" altLang="en-US" sz="1300">
+                <a:latin typeface="Arial" panose="020B0604020202020204" pitchFamily="34" charset="0"/>
+              </a:rPr>
+              <a:t> </a:t>
+            </a:r>
+            <a:r>
+              <a:rPr lang="az-Latn-AZ" altLang="en-US" sz="1300" b="1">
+                <a:latin typeface="Arial" panose="020B0604020202020204" pitchFamily="34" charset="0"/>
+              </a:rPr>
+              <a:t>modelini</a:t>
+            </a:r>
+            <a:r>
+              <a:rPr lang="az-Latn-AZ" altLang="en-US" sz="1300">
+                <a:latin typeface="Arial" panose="020B0604020202020204" pitchFamily="34" charset="0"/>
+              </a:rPr>
+              <a:t> çağıra və kateqoriya adını daha rahat bir şəkildə yaza bilərik. Növbəti slaydda....</a:t>
+            </a:r>
+            <a:endParaRPr kumimoji="0" lang="en-US" altLang="en-US" sz="1300" b="0" i="0" u="none" strike="noStrike" cap="none" normalizeH="0" baseline="0">
+              <a:ln>
+                <a:noFill/>
+              </a:ln>
+              <a:solidFill>
+                <a:schemeClr val="tx1"/>
+              </a:solidFill>
+              <a:effectLst/>
+              <a:latin typeface="Arial" panose="020B0604020202020204" pitchFamily="34" charset="0"/>
+            </a:endParaRPr>
+          </a:p>
+        </p:txBody>
+      </p:sp>
+      <p:pic>
+        <p:nvPicPr>
+          <p:cNvPr id="4" name="Picture 3">
+            <a:extLst>
+              <a:ext uri="{FF2B5EF4-FFF2-40B4-BE49-F238E27FC236}">
+                <a16:creationId xmlns:a16="http://schemas.microsoft.com/office/drawing/2014/main" id="{C6040232-45DA-69FA-9C8C-4CD3FEC2E9D2}"/>
+              </a:ext>
+            </a:extLst>
+          </p:cNvPr>
+          <p:cNvPicPr>
+            <a:picLocks noChangeAspect="1"/>
+          </p:cNvPicPr>
+          <p:nvPr/>
+        </p:nvPicPr>
+        <p:blipFill>
+          <a:blip r:embed="rId2"/>
+          <a:stretch>
+            <a:fillRect/>
+          </a:stretch>
+        </p:blipFill>
+        <p:spPr>
+          <a:xfrm>
+            <a:off x="5354425" y="1395176"/>
+            <a:ext cx="6837574" cy="5462824"/>
+          </a:xfrm>
+          <a:prstGeom prst="rect">
+            <a:avLst/>
+          </a:prstGeom>
+        </p:spPr>
+      </p:pic>
+    </p:spTree>
+    <p:extLst>
+      <p:ext uri="{BB962C8B-B14F-4D97-AF65-F5344CB8AC3E}">
+        <p14:creationId xmlns:p14="http://schemas.microsoft.com/office/powerpoint/2010/main" val="3845453752"/>
+      </p:ext>
+    </p:extLst>
+  </p:cSld>
+  <p:clrMapOvr>
+    <a:masterClrMapping/>
+  </p:clrMapOvr>
+</p:sld>
+</file>
+
+<file path=ppt/slides/slide3.xml><?xml version="1.0" encoding="utf-8"?>
 <p:sld xmlns:a="http://schemas.openxmlformats.org/drawingml/2006/main" xmlns:r="http://schemas.openxmlformats.org/officeDocument/2006/relationships" xmlns:p="http://schemas.openxmlformats.org/presentationml/2006/main">
   <p:cSld>
     <p:spTree>
@@ -3456,21 +4099,60 @@
               <a:buNone/>
             </a:pPr>
             <a:r>
-              <a:rPr kumimoji="0" lang="en-US" altLang="en-US" sz="1300" b="0" i="0" u="none" strike="noStrike" cap="none" normalizeH="0" baseline="0">
-                <a:ln>
-                  <a:noFill/>
-                </a:ln>
-                <a:solidFill>
-                  <a:schemeClr val="tx1"/>
-                </a:solidFill>
-                <a:effectLst/>
-                <a:latin typeface="Arial" panose="020B0604020202020204" pitchFamily="34" charset="0"/>
-              </a:rPr>
-              <a:t>.</a:t>
-            </a:r>
-          </a:p>
-        </p:txBody>
-      </p:sp>
+              <a:rPr lang="en-US" altLang="en-US" sz="1300">
+                <a:latin typeface="Arial" panose="020B0604020202020204" pitchFamily="34" charset="0"/>
+              </a:rPr>
+              <a:t>Bu c</a:t>
+            </a:r>
+            <a:r>
+              <a:rPr lang="az-Latn-AZ" altLang="en-US" sz="1300">
+                <a:latin typeface="Arial" panose="020B0604020202020204" pitchFamily="34" charset="0"/>
+              </a:rPr>
+              <a:t>ür</a:t>
+            </a:r>
+            <a:endParaRPr kumimoji="0" lang="en-US" altLang="en-US" sz="1300" b="0" i="0" u="none" strike="noStrike" cap="none" normalizeH="0" baseline="0">
+              <a:ln>
+                <a:noFill/>
+              </a:ln>
+              <a:solidFill>
+                <a:schemeClr val="tx1"/>
+              </a:solidFill>
+              <a:effectLst/>
+              <a:latin typeface="Arial" panose="020B0604020202020204" pitchFamily="34" charset="0"/>
+            </a:endParaRPr>
+          </a:p>
+        </p:txBody>
+      </p:sp>
+      <p:pic>
+        <p:nvPicPr>
+          <p:cNvPr id="4" name="Picture 3">
+            <a:extLst>
+              <a:ext uri="{FF2B5EF4-FFF2-40B4-BE49-F238E27FC236}">
+                <a16:creationId xmlns:a16="http://schemas.microsoft.com/office/drawing/2014/main" id="{1C6F722F-D448-2084-868D-28CCF0106E61}"/>
+              </a:ext>
+            </a:extLst>
+          </p:cNvPr>
+          <p:cNvPicPr>
+            <a:picLocks noChangeAspect="1"/>
+          </p:cNvPicPr>
+          <p:nvPr/>
+        </p:nvPicPr>
+        <p:blipFill>
+          <a:blip r:embed="rId2"/>
+          <a:stretch>
+            <a:fillRect/>
+          </a:stretch>
+        </p:blipFill>
+        <p:spPr>
+          <a:xfrm>
+            <a:off x="3646429" y="0"/>
+            <a:ext cx="8545571" cy="6858000"/>
+          </a:xfrm>
+          <a:prstGeom prst="rect">
+            <a:avLst/>
+          </a:prstGeom>
+        </p:spPr>
+      </p:pic>
     </p:spTree>
     <p:extLst>
       <p:ext uri="{BB962C8B-B14F-4D97-AF65-F5344CB8AC3E}">
@@ -3484,7 +4166,138 @@
 </p:sld>
 </file>
 
-<file path=ppt/slides/slide3.xml><?xml version="1.0" encoding="utf-8"?>
+<file path=ppt/slides/slide4.xml><?xml version="1.0" encoding="utf-8"?>
+<p:sld xmlns:a="http://schemas.openxmlformats.org/drawingml/2006/main" xmlns:r="http://schemas.openxmlformats.org/officeDocument/2006/relationships" xmlns:p="http://schemas.openxmlformats.org/presentationml/2006/main">
+  <p:cSld>
+    <p:spTree>
+      <p:nvGrpSpPr>
+        <p:cNvPr id="1" name="">
+          <a:extLst>
+            <a:ext uri="{FF2B5EF4-FFF2-40B4-BE49-F238E27FC236}">
+              <a16:creationId xmlns:a16="http://schemas.microsoft.com/office/drawing/2014/main" id="{AB26DDED-A516-9002-FEFC-2ECCC8E7C4C4}"/>
+            </a:ext>
+          </a:extLst>
+        </p:cNvPr>
+        <p:cNvGrpSpPr/>
+        <p:nvPr/>
+      </p:nvGrpSpPr>
+      <p:grpSpPr>
+        <a:xfrm>
+          <a:off x="0" y="0"/>
+          <a:ext cx="0" cy="0"/>
+          <a:chOff x="0" y="0"/>
+          <a:chExt cx="0" cy="0"/>
+        </a:xfrm>
+      </p:grpSpPr>
+      <p:sp>
+        <p:nvSpPr>
+          <p:cNvPr id="3" name="TextBox 2">
+            <a:extLst>
+              <a:ext uri="{FF2B5EF4-FFF2-40B4-BE49-F238E27FC236}">
+                <a16:creationId xmlns:a16="http://schemas.microsoft.com/office/drawing/2014/main" id="{01B9BDE2-A11E-5567-F220-73B5994D58AA}"/>
+              </a:ext>
+            </a:extLst>
+          </p:cNvPr>
+          <p:cNvSpPr txBox="1"/>
+          <p:nvPr/>
+        </p:nvSpPr>
+        <p:spPr>
+          <a:xfrm>
+            <a:off x="217714" y="255046"/>
+            <a:ext cx="11756571" cy="355354"/>
+          </a:xfrm>
+          <a:prstGeom prst="rect">
+            <a:avLst/>
+          </a:prstGeom>
+          <a:noFill/>
+        </p:spPr>
+        <p:txBody>
+          <a:bodyPr wrap="square">
+            <a:spAutoFit/>
+          </a:bodyPr>
+          <a:lstStyle/>
+          <a:p>
+            <a:pPr>
+              <a:lnSpc>
+                <a:spcPct val="150000"/>
+              </a:lnSpc>
+              <a:buNone/>
+            </a:pPr>
+            <a:r>
+              <a:rPr lang="az-Latn-AZ" altLang="en-US" sz="1300">
+                <a:latin typeface="Arial" panose="020B0604020202020204" pitchFamily="34" charset="0"/>
+              </a:rPr>
+              <a:t>Eynisini </a:t>
+            </a:r>
+            <a:r>
+              <a:rPr lang="az-Latn-AZ" altLang="en-US" sz="1300" b="1">
+                <a:latin typeface="Arial" panose="020B0604020202020204" pitchFamily="34" charset="0"/>
+              </a:rPr>
+              <a:t>Trashed</a:t>
+            </a:r>
+            <a:r>
+              <a:rPr lang="az-Latn-AZ" altLang="en-US" sz="1300">
+                <a:latin typeface="Arial" panose="020B0604020202020204" pitchFamily="34" charset="0"/>
+              </a:rPr>
+              <a:t> üçündə edirik.</a:t>
+            </a:r>
+            <a:endParaRPr kumimoji="0" lang="en-US" altLang="en-US" sz="1300" b="0" i="0" u="none" strike="noStrike" cap="none" normalizeH="0" baseline="0">
+              <a:ln>
+                <a:noFill/>
+              </a:ln>
+              <a:solidFill>
+                <a:schemeClr val="tx1"/>
+              </a:solidFill>
+              <a:effectLst/>
+              <a:latin typeface="Arial" panose="020B0604020202020204" pitchFamily="34" charset="0"/>
+            </a:endParaRPr>
+          </a:p>
+        </p:txBody>
+      </p:sp>
+      <p:pic>
+        <p:nvPicPr>
+          <p:cNvPr id="4" name="Picture 3">
+            <a:extLst>
+              <a:ext uri="{FF2B5EF4-FFF2-40B4-BE49-F238E27FC236}">
+                <a16:creationId xmlns:a16="http://schemas.microsoft.com/office/drawing/2014/main" id="{5B182039-3EA5-3B09-0E54-9FB5A0DF4461}"/>
+              </a:ext>
+            </a:extLst>
+          </p:cNvPr>
+          <p:cNvPicPr>
+            <a:picLocks noChangeAspect="1"/>
+          </p:cNvPicPr>
+          <p:nvPr/>
+        </p:nvPicPr>
+        <p:blipFill>
+          <a:blip r:embed="rId2"/>
+          <a:stretch>
+            <a:fillRect/>
+          </a:stretch>
+        </p:blipFill>
+        <p:spPr>
+          <a:xfrm>
+            <a:off x="3586057" y="0"/>
+            <a:ext cx="8605943" cy="6858000"/>
+          </a:xfrm>
+          <a:prstGeom prst="rect">
+            <a:avLst/>
+          </a:prstGeom>
+        </p:spPr>
+      </p:pic>
+    </p:spTree>
+    <p:extLst>
+      <p:ext uri="{BB962C8B-B14F-4D97-AF65-F5344CB8AC3E}">
+        <p14:creationId xmlns:p14="http://schemas.microsoft.com/office/powerpoint/2010/main" val="2445490"/>
+      </p:ext>
+    </p:extLst>
+  </p:cSld>
+  <p:clrMapOvr>
+    <a:masterClrMapping/>
+  </p:clrMapOvr>
+</p:sld>
+</file>
+
+<file path=ppt/slides/slide5.xml><?xml version="1.0" encoding="utf-8"?>
 <p:sld xmlns:a="http://schemas.openxmlformats.org/drawingml/2006/main" xmlns:r="http://schemas.openxmlformats.org/officeDocument/2006/relationships" xmlns:p="http://schemas.openxmlformats.org/presentationml/2006/main">
   <p:cSld>
     <p:spTree>
@@ -3522,7 +4335,7 @@
         <p:spPr>
           <a:xfrm>
             <a:off x="217714" y="255046"/>
-            <a:ext cx="11756571" cy="355354"/>
+            <a:ext cx="4976455" cy="3556230"/>
           </a:xfrm>
           <a:prstGeom prst="rect">
             <a:avLst/>
@@ -3537,10 +4350,23 @@
           <a:p>
             <a:pPr>
               <a:lnSpc>
-                <a:spcPct val="150000"/>
+                <a:spcPct val="200000"/>
               </a:lnSpc>
               <a:buNone/>
             </a:pPr>
+            <a:r>
+              <a:rPr kumimoji="0" lang="en-US" altLang="en-US" sz="1300" b="1" i="0" u="none" strike="noStrike" cap="none" normalizeH="0" baseline="0">
+                <a:ln>
+                  <a:noFill/>
+                </a:ln>
+                <a:solidFill>
+                  <a:schemeClr val="tx1"/>
+                </a:solidFill>
+                <a:effectLst/>
+                <a:latin typeface="Arial" panose="020B0604020202020204" pitchFamily="34" charset="0"/>
+              </a:rPr>
+              <a:t>Show</a:t>
+            </a:r>
             <a:r>
               <a:rPr kumimoji="0" lang="en-US" altLang="en-US" sz="1300" b="0" i="0" u="none" strike="noStrike" cap="none" normalizeH="0" baseline="0">
                 <a:ln>
@@ -3552,11 +4378,398 @@
                 <a:effectLst/>
                 <a:latin typeface="Arial" panose="020B0604020202020204" pitchFamily="34" charset="0"/>
               </a:rPr>
-              <a:t>.</a:t>
-            </a:r>
-          </a:p>
-        </p:txBody>
-      </p:sp>
+              <a:t> </a:t>
+            </a:r>
+            <a:r>
+              <a:rPr kumimoji="0" lang="az-Latn-AZ" altLang="en-US" sz="1300" b="0" i="0" u="none" strike="noStrike" cap="none" normalizeH="0" baseline="0">
+                <a:ln>
+                  <a:noFill/>
+                </a:ln>
+                <a:solidFill>
+                  <a:schemeClr val="tx1"/>
+                </a:solidFill>
+                <a:effectLst/>
+                <a:latin typeface="Arial" panose="020B0604020202020204" pitchFamily="34" charset="0"/>
+              </a:rPr>
+              <a:t>şablonunda isə </a:t>
+            </a:r>
+            <a:r>
+              <a:rPr kumimoji="0" lang="az-Latn-AZ" altLang="en-US" sz="1300" b="1" i="0" u="none" strike="noStrike" cap="none" normalizeH="0" baseline="0">
+                <a:ln>
+                  <a:noFill/>
+                </a:ln>
+                <a:solidFill>
+                  <a:schemeClr val="tx1"/>
+                </a:solidFill>
+                <a:effectLst/>
+                <a:latin typeface="Arial" panose="020B0604020202020204" pitchFamily="34" charset="0"/>
+              </a:rPr>
+              <a:t>kateqoriya</a:t>
+            </a:r>
+            <a:r>
+              <a:rPr kumimoji="0" lang="az-Latn-AZ" altLang="en-US" sz="1300" b="0" i="0" u="none" strike="noStrike" cap="none" normalizeH="0" baseline="0">
+                <a:ln>
+                  <a:noFill/>
+                </a:ln>
+                <a:solidFill>
+                  <a:schemeClr val="tx1"/>
+                </a:solidFill>
+                <a:effectLst/>
+                <a:latin typeface="Arial" panose="020B0604020202020204" pitchFamily="34" charset="0"/>
+              </a:rPr>
+              <a:t> adlarını göstərmək üçün </a:t>
+            </a:r>
+            <a:r>
+              <a:rPr kumimoji="0" lang="az-Latn-AZ" altLang="en-US" sz="1300" b="1" i="0" u="none" strike="noStrike" cap="none" normalizeH="0" baseline="0">
+                <a:ln>
+                  <a:noFill/>
+                </a:ln>
+                <a:solidFill>
+                  <a:schemeClr val="tx1"/>
+                </a:solidFill>
+                <a:effectLst/>
+                <a:latin typeface="Arial" panose="020B0604020202020204" pitchFamily="34" charset="0"/>
+              </a:rPr>
+              <a:t>PostController</a:t>
+            </a:r>
+            <a:r>
+              <a:rPr kumimoji="0" lang="az-Latn-AZ" altLang="en-US" sz="1300" b="0" i="0" u="none" strike="noStrike" cap="none" normalizeH="0" baseline="0">
+                <a:ln>
+                  <a:noFill/>
+                </a:ln>
+                <a:solidFill>
+                  <a:schemeClr val="tx1"/>
+                </a:solidFill>
+                <a:effectLst/>
+                <a:latin typeface="Arial" panose="020B0604020202020204" pitchFamily="34" charset="0"/>
+              </a:rPr>
+              <a:t> -in </a:t>
+            </a:r>
+            <a:r>
+              <a:rPr kumimoji="0" lang="en-US" altLang="en-US" sz="1300" b="1" i="0" u="none" strike="noStrike" cap="none" normalizeH="0" baseline="0">
+                <a:ln>
+                  <a:noFill/>
+                </a:ln>
+                <a:solidFill>
+                  <a:schemeClr val="tx1"/>
+                </a:solidFill>
+                <a:effectLst/>
+                <a:latin typeface="Arial" panose="020B0604020202020204" pitchFamily="34" charset="0"/>
+              </a:rPr>
+              <a:t>show() </a:t>
+            </a:r>
+            <a:r>
+              <a:rPr kumimoji="0" lang="az-Latn-AZ" altLang="en-US" sz="1300" b="0" i="0" u="none" strike="noStrike" cap="none" normalizeH="0" baseline="0">
+                <a:ln>
+                  <a:noFill/>
+                </a:ln>
+                <a:solidFill>
+                  <a:schemeClr val="tx1"/>
+                </a:solidFill>
+                <a:effectLst/>
+                <a:latin typeface="Arial" panose="020B0604020202020204" pitchFamily="34" charset="0"/>
+              </a:rPr>
+              <a:t>metodunda </a:t>
+            </a:r>
+            <a:r>
+              <a:rPr kumimoji="0" lang="en-US" altLang="en-US" sz="1300" b="1" i="0" u="none" strike="noStrike" cap="none" normalizeH="0" baseline="0">
+                <a:ln>
+                  <a:noFill/>
+                </a:ln>
+                <a:solidFill>
+                  <a:schemeClr val="tx1"/>
+                </a:solidFill>
+                <a:effectLst/>
+                <a:latin typeface="Arial" panose="020B0604020202020204" pitchFamily="34" charset="0"/>
+              </a:rPr>
+              <a:t>Category</a:t>
+            </a:r>
+            <a:r>
+              <a:rPr kumimoji="0" lang="en-US" altLang="en-US" sz="1300" b="0" i="0" u="none" strike="noStrike" cap="none" normalizeH="0" baseline="0">
+                <a:ln>
+                  <a:noFill/>
+                </a:ln>
+                <a:solidFill>
+                  <a:schemeClr val="tx1"/>
+                </a:solidFill>
+                <a:effectLst/>
+                <a:latin typeface="Arial" panose="020B0604020202020204" pitchFamily="34" charset="0"/>
+              </a:rPr>
+              <a:t> modleini </a:t>
+            </a:r>
+            <a:r>
+              <a:rPr kumimoji="0" lang="az-Latn-AZ" altLang="en-US" sz="1300" b="0" i="0" u="none" strike="noStrike" cap="none" normalizeH="0" baseline="0">
+                <a:ln>
+                  <a:noFill/>
+                </a:ln>
+                <a:solidFill>
+                  <a:schemeClr val="tx1"/>
+                </a:solidFill>
+                <a:effectLst/>
+                <a:latin typeface="Arial" panose="020B0604020202020204" pitchFamily="34" charset="0"/>
+              </a:rPr>
+              <a:t>çağırıb şablona göndərmişik ki, burada </a:t>
+            </a:r>
+            <a:r>
+              <a:rPr kumimoji="0" lang="az-Latn-AZ" altLang="en-US" sz="1300" b="1" i="0" u="none" strike="noStrike" cap="none" normalizeH="0" baseline="0">
+                <a:ln>
+                  <a:noFill/>
+                </a:ln>
+                <a:solidFill>
+                  <a:schemeClr val="tx1"/>
+                </a:solidFill>
+                <a:effectLst/>
+                <a:latin typeface="Arial" panose="020B0604020202020204" pitchFamily="34" charset="0"/>
+              </a:rPr>
+              <a:t>kateqoriya</a:t>
+            </a:r>
+            <a:r>
+              <a:rPr kumimoji="0" lang="az-Latn-AZ" altLang="en-US" sz="1300" b="0" i="0" u="none" strike="noStrike" cap="none" normalizeH="0" baseline="0">
+                <a:ln>
+                  <a:noFill/>
+                </a:ln>
+                <a:solidFill>
+                  <a:schemeClr val="tx1"/>
+                </a:solidFill>
+                <a:effectLst/>
+                <a:latin typeface="Arial" panose="020B0604020202020204" pitchFamily="34" charset="0"/>
+              </a:rPr>
+              <a:t> ilə </a:t>
+            </a:r>
+            <a:r>
+              <a:rPr kumimoji="0" lang="az-Latn-AZ" altLang="en-US" sz="1300" b="1" i="0" u="none" strike="noStrike" cap="none" normalizeH="0" baseline="0">
+                <a:ln>
+                  <a:noFill/>
+                </a:ln>
+                <a:solidFill>
+                  <a:schemeClr val="tx1"/>
+                </a:solidFill>
+                <a:effectLst/>
+                <a:latin typeface="Arial" panose="020B0604020202020204" pitchFamily="34" charset="0"/>
+              </a:rPr>
+              <a:t>post</a:t>
+            </a:r>
+            <a:r>
+              <a:rPr kumimoji="0" lang="az-Latn-AZ" altLang="en-US" sz="1300" b="0" i="0" u="none" strike="noStrike" cap="none" normalizeH="0" baseline="0">
+                <a:ln>
+                  <a:noFill/>
+                </a:ln>
+                <a:solidFill>
+                  <a:schemeClr val="tx1"/>
+                </a:solidFill>
+                <a:effectLst/>
+                <a:latin typeface="Arial" panose="020B0604020202020204" pitchFamily="34" charset="0"/>
+              </a:rPr>
+              <a:t> </a:t>
+            </a:r>
+            <a:r>
+              <a:rPr kumimoji="0" lang="az-Latn-AZ" altLang="en-US" sz="1300" b="1" i="0" u="none" strike="noStrike" cap="none" normalizeH="0" baseline="0">
+                <a:ln>
+                  <a:noFill/>
+                </a:ln>
+                <a:solidFill>
+                  <a:schemeClr val="tx1"/>
+                </a:solidFill>
+                <a:effectLst/>
+                <a:latin typeface="Arial" panose="020B0604020202020204" pitchFamily="34" charset="0"/>
+              </a:rPr>
+              <a:t>identifikatorularını</a:t>
+            </a:r>
+            <a:r>
+              <a:rPr kumimoji="0" lang="az-Latn-AZ" altLang="en-US" sz="1300" b="0" i="0" u="none" strike="noStrike" cap="none" normalizeH="0" baseline="0">
+                <a:ln>
+                  <a:noFill/>
+                </a:ln>
+                <a:solidFill>
+                  <a:schemeClr val="tx1"/>
+                </a:solidFill>
+                <a:effectLst/>
+                <a:latin typeface="Arial" panose="020B0604020202020204" pitchFamily="34" charset="0"/>
+              </a:rPr>
+              <a:t> </a:t>
+            </a:r>
+            <a:r>
+              <a:rPr kumimoji="0" lang="az-Latn-AZ" altLang="en-US" sz="1300" b="1" i="0" u="none" strike="noStrike" cap="none" normalizeH="0" baseline="0">
+                <a:ln>
+                  <a:noFill/>
+                </a:ln>
+                <a:solidFill>
+                  <a:schemeClr val="tx1"/>
+                </a:solidFill>
+                <a:effectLst/>
+                <a:latin typeface="Arial" panose="020B0604020202020204" pitchFamily="34" charset="0"/>
+              </a:rPr>
+              <a:t>== </a:t>
+            </a:r>
+            <a:r>
+              <a:rPr kumimoji="0" lang="az-Latn-AZ" altLang="en-US" sz="1300" b="0" i="0" u="none" strike="noStrike" cap="none" normalizeH="0" baseline="0">
+                <a:ln>
+                  <a:noFill/>
+                </a:ln>
+                <a:solidFill>
+                  <a:schemeClr val="tx1"/>
+                </a:solidFill>
+                <a:effectLst/>
+                <a:latin typeface="Arial" panose="020B0604020202020204" pitchFamily="34" charset="0"/>
+              </a:rPr>
+              <a:t>operatoru ilə müqayisə edib, </a:t>
+            </a:r>
+            <a:r>
+              <a:rPr kumimoji="0" lang="az-Latn-AZ" altLang="en-US" sz="1300" b="1" i="0" u="none" strike="noStrike" cap="none" normalizeH="0" baseline="0">
+                <a:ln>
+                  <a:noFill/>
+                </a:ln>
+                <a:solidFill>
+                  <a:schemeClr val="tx1"/>
+                </a:solidFill>
+                <a:effectLst/>
+                <a:latin typeface="Arial" panose="020B0604020202020204" pitchFamily="34" charset="0"/>
+              </a:rPr>
+              <a:t>True</a:t>
+            </a:r>
+            <a:r>
+              <a:rPr kumimoji="0" lang="az-Latn-AZ" altLang="en-US" sz="1300" b="0" i="0" u="none" strike="noStrike" cap="none" normalizeH="0" baseline="0">
+                <a:ln>
+                  <a:noFill/>
+                </a:ln>
+                <a:solidFill>
+                  <a:schemeClr val="tx1"/>
+                </a:solidFill>
+                <a:effectLst/>
+                <a:latin typeface="Arial" panose="020B0604020202020204" pitchFamily="34" charset="0"/>
+              </a:rPr>
+              <a:t> qayıdan dəyərlərdə </a:t>
+            </a:r>
+            <a:r>
+              <a:rPr kumimoji="0" lang="az-Latn-AZ" altLang="en-US" sz="1300" b="1" i="0" u="none" strike="noStrike" cap="none" normalizeH="0" baseline="0">
+                <a:ln>
+                  <a:noFill/>
+                </a:ln>
+                <a:solidFill>
+                  <a:schemeClr val="tx1"/>
+                </a:solidFill>
+                <a:effectLst/>
+                <a:latin typeface="Arial" panose="020B0604020202020204" pitchFamily="34" charset="0"/>
+              </a:rPr>
+              <a:t>kateqoriya</a:t>
+            </a:r>
+            <a:r>
+              <a:rPr kumimoji="0" lang="az-Latn-AZ" altLang="en-US" sz="1300" b="0" i="0" u="none" strike="noStrike" cap="none" normalizeH="0" baseline="0">
+                <a:ln>
+                  <a:noFill/>
+                </a:ln>
+                <a:solidFill>
+                  <a:schemeClr val="tx1"/>
+                </a:solidFill>
+                <a:effectLst/>
+                <a:latin typeface="Arial" panose="020B0604020202020204" pitchFamily="34" charset="0"/>
+              </a:rPr>
+              <a:t> adlarını çağıraq. </a:t>
+            </a:r>
+          </a:p>
+          <a:p>
+            <a:pPr>
+              <a:lnSpc>
+                <a:spcPct val="150000"/>
+              </a:lnSpc>
+              <a:buNone/>
+            </a:pPr>
+            <a:endParaRPr lang="az-Latn-AZ" altLang="en-US" sz="1300">
+              <a:latin typeface="Arial" panose="020B0604020202020204" pitchFamily="34" charset="0"/>
+            </a:endParaRPr>
+          </a:p>
+          <a:p>
+            <a:pPr>
+              <a:lnSpc>
+                <a:spcPct val="150000"/>
+              </a:lnSpc>
+              <a:buNone/>
+            </a:pPr>
+            <a:endParaRPr kumimoji="0" lang="az-Latn-AZ" altLang="en-US" sz="1300" b="0" i="0" u="none" strike="noStrike" cap="none" normalizeH="0" baseline="0">
+              <a:ln>
+                <a:noFill/>
+              </a:ln>
+              <a:solidFill>
+                <a:schemeClr val="tx1"/>
+              </a:solidFill>
+              <a:effectLst/>
+              <a:latin typeface="Arial" panose="020B0604020202020204" pitchFamily="34" charset="0"/>
+            </a:endParaRPr>
+          </a:p>
+          <a:p>
+            <a:pPr>
+              <a:lnSpc>
+                <a:spcPct val="150000"/>
+              </a:lnSpc>
+              <a:buNone/>
+            </a:pPr>
+            <a:endParaRPr lang="az-Latn-AZ" altLang="en-US" sz="1300">
+              <a:latin typeface="Arial" panose="020B0604020202020204" pitchFamily="34" charset="0"/>
+            </a:endParaRPr>
+          </a:p>
+          <a:p>
+            <a:pPr>
+              <a:lnSpc>
+                <a:spcPct val="150000"/>
+              </a:lnSpc>
+              <a:buNone/>
+            </a:pPr>
+            <a:r>
+              <a:rPr kumimoji="0" lang="az-Latn-AZ" altLang="en-US" sz="1300" b="0" i="0" u="none" strike="noStrike" cap="none" normalizeH="0" baseline="0">
+                <a:ln>
+                  <a:noFill/>
+                </a:ln>
+                <a:solidFill>
+                  <a:schemeClr val="tx1"/>
+                </a:solidFill>
+                <a:effectLst/>
+                <a:latin typeface="Arial" panose="020B0604020202020204" pitchFamily="34" charset="0"/>
+              </a:rPr>
+              <a:t>Qohumluq əlaqəsi ilə artıq buna ehtiyac qalmır. Şəkil növbəti slaydda....</a:t>
+            </a:r>
+            <a:endParaRPr kumimoji="0" lang="en-US" altLang="en-US" sz="1300" b="0" i="0" u="none" strike="noStrike" cap="none" normalizeH="0" baseline="0">
+              <a:ln>
+                <a:noFill/>
+              </a:ln>
+              <a:solidFill>
+                <a:schemeClr val="tx1"/>
+              </a:solidFill>
+              <a:effectLst/>
+              <a:latin typeface="Arial" panose="020B0604020202020204" pitchFamily="34" charset="0"/>
+            </a:endParaRPr>
+          </a:p>
+        </p:txBody>
+      </p:sp>
+      <p:pic>
+        <p:nvPicPr>
+          <p:cNvPr id="4" name="Picture 3">
+            <a:extLst>
+              <a:ext uri="{FF2B5EF4-FFF2-40B4-BE49-F238E27FC236}">
+                <a16:creationId xmlns:a16="http://schemas.microsoft.com/office/drawing/2014/main" id="{362B9F57-ACAC-A39E-53F8-379C782E6B0B}"/>
+              </a:ext>
+            </a:extLst>
+          </p:cNvPr>
+          <p:cNvPicPr>
+            <a:picLocks noChangeAspect="1"/>
+          </p:cNvPicPr>
+          <p:nvPr/>
+        </p:nvPicPr>
+        <p:blipFill>
+          <a:blip r:embed="rId2"/>
+          <a:stretch>
+            <a:fillRect/>
+          </a:stretch>
+        </p:blipFill>
+        <p:spPr>
+          <a:xfrm>
+            <a:off x="5310514" y="0"/>
+            <a:ext cx="6881486" cy="6858000"/>
+          </a:xfrm>
+          <a:prstGeom prst="rect">
+            <a:avLst/>
+          </a:prstGeom>
+        </p:spPr>
+      </p:pic>
     </p:spTree>
     <p:extLst>
       <p:ext uri="{BB962C8B-B14F-4D97-AF65-F5344CB8AC3E}">
@@ -3570,7 +4783,7 @@
 </p:sld>
 </file>
 
-<file path=ppt/slides/slide4.xml><?xml version="1.0" encoding="utf-8"?>
+<file path=ppt/slides/slide6.xml><?xml version="1.0" encoding="utf-8"?>
 <p:sld xmlns:a="http://schemas.openxmlformats.org/drawingml/2006/main" xmlns:r="http://schemas.openxmlformats.org/officeDocument/2006/relationships" xmlns:p="http://schemas.openxmlformats.org/presentationml/2006/main">
   <p:cSld>
     <p:spTree>
@@ -3578,7 +4791,7 @@
         <p:cNvPr id="1" name="">
           <a:extLst>
             <a:ext uri="{FF2B5EF4-FFF2-40B4-BE49-F238E27FC236}">
-              <a16:creationId xmlns:a16="http://schemas.microsoft.com/office/drawing/2014/main" id="{ECE25D7D-A080-F22B-7E8D-36EC827289A1}"/>
+              <a16:creationId xmlns:a16="http://schemas.microsoft.com/office/drawing/2014/main" id="{38E9F822-A939-D92D-9F55-FD05FC6C1C01}"/>
             </a:ext>
           </a:extLst>
         </p:cNvPr>
@@ -3598,7 +4811,7 @@
           <p:cNvPr id="3" name="TextBox 2">
             <a:extLst>
               <a:ext uri="{FF2B5EF4-FFF2-40B4-BE49-F238E27FC236}">
-                <a16:creationId xmlns:a16="http://schemas.microsoft.com/office/drawing/2014/main" id="{E33F16A3-A6E8-401E-847B-09570DC6E4CB}"/>
+                <a16:creationId xmlns:a16="http://schemas.microsoft.com/office/drawing/2014/main" id="{6140F274-D2FE-FD46-D7BC-D85ED4CC1B20}"/>
               </a:ext>
             </a:extLst>
           </p:cNvPr>
@@ -3643,10 +4856,298 @@
           </a:p>
         </p:txBody>
       </p:sp>
+      <p:pic>
+        <p:nvPicPr>
+          <p:cNvPr id="4" name="Picture 3">
+            <a:extLst>
+              <a:ext uri="{FF2B5EF4-FFF2-40B4-BE49-F238E27FC236}">
+                <a16:creationId xmlns:a16="http://schemas.microsoft.com/office/drawing/2014/main" id="{0DE61FF2-EC70-6661-6E39-4E467A0040CB}"/>
+              </a:ext>
+            </a:extLst>
+          </p:cNvPr>
+          <p:cNvPicPr>
+            <a:picLocks noChangeAspect="1"/>
+          </p:cNvPicPr>
+          <p:nvPr/>
+        </p:nvPicPr>
+        <p:blipFill>
+          <a:blip r:embed="rId2"/>
+          <a:stretch>
+            <a:fillRect/>
+          </a:stretch>
+        </p:blipFill>
+        <p:spPr>
+          <a:xfrm>
+            <a:off x="0" y="343129"/>
+            <a:ext cx="12192000" cy="6514871"/>
+          </a:xfrm>
+          <a:prstGeom prst="rect">
+            <a:avLst/>
+          </a:prstGeom>
+        </p:spPr>
+      </p:pic>
     </p:spTree>
     <p:extLst>
       <p:ext uri="{BB962C8B-B14F-4D97-AF65-F5344CB8AC3E}">
-        <p14:creationId xmlns:p14="http://schemas.microsoft.com/office/powerpoint/2010/main" val="3095838342"/>
+        <p14:creationId xmlns:p14="http://schemas.microsoft.com/office/powerpoint/2010/main" val="2776401749"/>
+      </p:ext>
+    </p:extLst>
+  </p:cSld>
+  <p:clrMapOvr>
+    <a:masterClrMapping/>
+  </p:clrMapOvr>
+</p:sld>
+</file>
+
+<file path=ppt/slides/slide7.xml><?xml version="1.0" encoding="utf-8"?>
+<p:sld xmlns:a="http://schemas.openxmlformats.org/drawingml/2006/main" xmlns:r="http://schemas.openxmlformats.org/officeDocument/2006/relationships" xmlns:p="http://schemas.openxmlformats.org/presentationml/2006/main">
+  <p:cSld>
+    <p:spTree>
+      <p:nvGrpSpPr>
+        <p:cNvPr id="1" name="">
+          <a:extLst>
+            <a:ext uri="{FF2B5EF4-FFF2-40B4-BE49-F238E27FC236}">
+              <a16:creationId xmlns:a16="http://schemas.microsoft.com/office/drawing/2014/main" id="{A005986B-BF5A-F181-F681-7733CEC96D91}"/>
+            </a:ext>
+          </a:extLst>
+        </p:cNvPr>
+        <p:cNvGrpSpPr/>
+        <p:nvPr/>
+      </p:nvGrpSpPr>
+      <p:grpSpPr>
+        <a:xfrm>
+          <a:off x="0" y="0"/>
+          <a:ext cx="0" cy="0"/>
+          <a:chOff x="0" y="0"/>
+          <a:chExt cx="0" cy="0"/>
+        </a:xfrm>
+      </p:grpSpPr>
+      <p:sp>
+        <p:nvSpPr>
+          <p:cNvPr id="3" name="TextBox 2">
+            <a:extLst>
+              <a:ext uri="{FF2B5EF4-FFF2-40B4-BE49-F238E27FC236}">
+                <a16:creationId xmlns:a16="http://schemas.microsoft.com/office/drawing/2014/main" id="{A034F25D-6727-E7DF-19C6-EBA10A413A0C}"/>
+              </a:ext>
+            </a:extLst>
+          </p:cNvPr>
+          <p:cNvSpPr txBox="1"/>
+          <p:nvPr/>
+        </p:nvSpPr>
+        <p:spPr>
+          <a:xfrm>
+            <a:off x="217714" y="255046"/>
+            <a:ext cx="11756571" cy="355354"/>
+          </a:xfrm>
+          <a:prstGeom prst="rect">
+            <a:avLst/>
+          </a:prstGeom>
+          <a:noFill/>
+        </p:spPr>
+        <p:txBody>
+          <a:bodyPr wrap="square">
+            <a:spAutoFit/>
+          </a:bodyPr>
+          <a:lstStyle/>
+          <a:p>
+            <a:pPr>
+              <a:lnSpc>
+                <a:spcPct val="150000"/>
+              </a:lnSpc>
+              <a:buNone/>
+            </a:pPr>
+            <a:r>
+              <a:rPr kumimoji="0" lang="en-US" altLang="en-US" sz="1300" b="0" i="0" u="none" strike="noStrike" cap="none" normalizeH="0" baseline="0">
+                <a:ln>
+                  <a:noFill/>
+                </a:ln>
+                <a:solidFill>
+                  <a:schemeClr val="tx1"/>
+                </a:solidFill>
+                <a:effectLst/>
+                <a:latin typeface="Arial" panose="020B0604020202020204" pitchFamily="34" charset="0"/>
+              </a:rPr>
+              <a:t>.</a:t>
+            </a:r>
+          </a:p>
+        </p:txBody>
+      </p:sp>
+    </p:spTree>
+    <p:extLst>
+      <p:ext uri="{BB962C8B-B14F-4D97-AF65-F5344CB8AC3E}">
+        <p14:creationId xmlns:p14="http://schemas.microsoft.com/office/powerpoint/2010/main" val="329141076"/>
+      </p:ext>
+    </p:extLst>
+  </p:cSld>
+  <p:clrMapOvr>
+    <a:masterClrMapping/>
+  </p:clrMapOvr>
+</p:sld>
+</file>
+
+<file path=ppt/slides/slide8.xml><?xml version="1.0" encoding="utf-8"?>
+<p:sld xmlns:a="http://schemas.openxmlformats.org/drawingml/2006/main" xmlns:r="http://schemas.openxmlformats.org/officeDocument/2006/relationships" xmlns:p="http://schemas.openxmlformats.org/presentationml/2006/main">
+  <p:cSld>
+    <p:spTree>
+      <p:nvGrpSpPr>
+        <p:cNvPr id="1" name="">
+          <a:extLst>
+            <a:ext uri="{FF2B5EF4-FFF2-40B4-BE49-F238E27FC236}">
+              <a16:creationId xmlns:a16="http://schemas.microsoft.com/office/drawing/2014/main" id="{5954DAFB-CCF0-066D-97D9-CCF8AC8E8575}"/>
+            </a:ext>
+          </a:extLst>
+        </p:cNvPr>
+        <p:cNvGrpSpPr/>
+        <p:nvPr/>
+      </p:nvGrpSpPr>
+      <p:grpSpPr>
+        <a:xfrm>
+          <a:off x="0" y="0"/>
+          <a:ext cx="0" cy="0"/>
+          <a:chOff x="0" y="0"/>
+          <a:chExt cx="0" cy="0"/>
+        </a:xfrm>
+      </p:grpSpPr>
+      <p:sp>
+        <p:nvSpPr>
+          <p:cNvPr id="3" name="TextBox 2">
+            <a:extLst>
+              <a:ext uri="{FF2B5EF4-FFF2-40B4-BE49-F238E27FC236}">
+                <a16:creationId xmlns:a16="http://schemas.microsoft.com/office/drawing/2014/main" id="{CAD46488-15B7-6C74-0463-13F9FC516B75}"/>
+              </a:ext>
+            </a:extLst>
+          </p:cNvPr>
+          <p:cNvSpPr txBox="1"/>
+          <p:nvPr/>
+        </p:nvSpPr>
+        <p:spPr>
+          <a:xfrm>
+            <a:off x="217714" y="255046"/>
+            <a:ext cx="11756571" cy="355354"/>
+          </a:xfrm>
+          <a:prstGeom prst="rect">
+            <a:avLst/>
+          </a:prstGeom>
+          <a:noFill/>
+        </p:spPr>
+        <p:txBody>
+          <a:bodyPr wrap="square">
+            <a:spAutoFit/>
+          </a:bodyPr>
+          <a:lstStyle/>
+          <a:p>
+            <a:pPr>
+              <a:lnSpc>
+                <a:spcPct val="150000"/>
+              </a:lnSpc>
+              <a:buNone/>
+            </a:pPr>
+            <a:r>
+              <a:rPr kumimoji="0" lang="en-US" altLang="en-US" sz="1300" b="0" i="0" u="none" strike="noStrike" cap="none" normalizeH="0" baseline="0">
+                <a:ln>
+                  <a:noFill/>
+                </a:ln>
+                <a:solidFill>
+                  <a:schemeClr val="tx1"/>
+                </a:solidFill>
+                <a:effectLst/>
+                <a:latin typeface="Arial" panose="020B0604020202020204" pitchFamily="34" charset="0"/>
+              </a:rPr>
+              <a:t>.</a:t>
+            </a:r>
+          </a:p>
+        </p:txBody>
+      </p:sp>
+    </p:spTree>
+    <p:extLst>
+      <p:ext uri="{BB962C8B-B14F-4D97-AF65-F5344CB8AC3E}">
+        <p14:creationId xmlns:p14="http://schemas.microsoft.com/office/powerpoint/2010/main" val="46959890"/>
+      </p:ext>
+    </p:extLst>
+  </p:cSld>
+  <p:clrMapOvr>
+    <a:masterClrMapping/>
+  </p:clrMapOvr>
+</p:sld>
+</file>
+
+<file path=ppt/slides/slide9.xml><?xml version="1.0" encoding="utf-8"?>
+<p:sld xmlns:a="http://schemas.openxmlformats.org/drawingml/2006/main" xmlns:r="http://schemas.openxmlformats.org/officeDocument/2006/relationships" xmlns:p="http://schemas.openxmlformats.org/presentationml/2006/main">
+  <p:cSld>
+    <p:spTree>
+      <p:nvGrpSpPr>
+        <p:cNvPr id="1" name="">
+          <a:extLst>
+            <a:ext uri="{FF2B5EF4-FFF2-40B4-BE49-F238E27FC236}">
+              <a16:creationId xmlns:a16="http://schemas.microsoft.com/office/drawing/2014/main" id="{304A17B3-CCAE-F9D9-27D6-795215DAB9E1}"/>
+            </a:ext>
+          </a:extLst>
+        </p:cNvPr>
+        <p:cNvGrpSpPr/>
+        <p:nvPr/>
+      </p:nvGrpSpPr>
+      <p:grpSpPr>
+        <a:xfrm>
+          <a:off x="0" y="0"/>
+          <a:ext cx="0" cy="0"/>
+          <a:chOff x="0" y="0"/>
+          <a:chExt cx="0" cy="0"/>
+        </a:xfrm>
+      </p:grpSpPr>
+      <p:sp>
+        <p:nvSpPr>
+          <p:cNvPr id="3" name="TextBox 2">
+            <a:extLst>
+              <a:ext uri="{FF2B5EF4-FFF2-40B4-BE49-F238E27FC236}">
+                <a16:creationId xmlns:a16="http://schemas.microsoft.com/office/drawing/2014/main" id="{9A8FFAB7-70B7-FA1C-D309-844C5AAB1A7A}"/>
+              </a:ext>
+            </a:extLst>
+          </p:cNvPr>
+          <p:cNvSpPr txBox="1"/>
+          <p:nvPr/>
+        </p:nvSpPr>
+        <p:spPr>
+          <a:xfrm>
+            <a:off x="217714" y="255046"/>
+            <a:ext cx="11756571" cy="355354"/>
+          </a:xfrm>
+          <a:prstGeom prst="rect">
+            <a:avLst/>
+          </a:prstGeom>
+          <a:noFill/>
+        </p:spPr>
+        <p:txBody>
+          <a:bodyPr wrap="square">
+            <a:spAutoFit/>
+          </a:bodyPr>
+          <a:lstStyle/>
+          <a:p>
+            <a:pPr>
+              <a:lnSpc>
+                <a:spcPct val="150000"/>
+              </a:lnSpc>
+              <a:buNone/>
+            </a:pPr>
+            <a:r>
+              <a:rPr kumimoji="0" lang="en-US" altLang="en-US" sz="1300" b="0" i="0" u="none" strike="noStrike" cap="none" normalizeH="0" baseline="0">
+                <a:ln>
+                  <a:noFill/>
+                </a:ln>
+                <a:solidFill>
+                  <a:schemeClr val="tx1"/>
+                </a:solidFill>
+                <a:effectLst/>
+                <a:latin typeface="Arial" panose="020B0604020202020204" pitchFamily="34" charset="0"/>
+              </a:rPr>
+              <a:t>.</a:t>
+            </a:r>
+          </a:p>
+        </p:txBody>
+      </p:sp>
+    </p:spTree>
+    <p:extLst>
+      <p:ext uri="{BB962C8B-B14F-4D97-AF65-F5344CB8AC3E}">
+        <p14:creationId xmlns:p14="http://schemas.microsoft.com/office/powerpoint/2010/main" val="2236521047"/>
       </p:ext>
     </p:extLst>
   </p:cSld>
